--- a/Курсовой проект Презентация.pptx
+++ b/Курсовой проект Презентация.pptx
@@ -111,7 +111,7 @@
   </p:defaultTextStyle>
   <p:extLst>
     <p:ext uri="{EFAFB233-063F-42B5-8137-9DF3F51BA10A}">
-      <p15:sldGuideLst xmlns:p15="http://schemas.microsoft.com/office/powerpoint/2012/main">
+      <p15:sldGuideLst xmlns:p15="http://schemas.microsoft.com/office/powerpoint/2012/main" xmlns="">
         <p15:guide id="1" orient="horz" pos="2160" userDrawn="1">
           <p15:clr>
             <a:srgbClr val="A4A3A4"/>
@@ -258,7 +258,7 @@
             <a:fld id="{1160EA64-D806-43AC-9DF2-F8C432F32B4C}" type="datetimeFigureOut">
               <a:rPr lang="en-US" smtClean="0"/>
               <a:pPr/>
-              <a:t>12/19/2025</a:t>
+              <a:t>12/20/2025</a:t>
             </a:fld>
             <a:endParaRPr lang="en-US" dirty="0"/>
           </a:p>
@@ -310,7 +310,7 @@
     </p:spTree>
     <p:extLst>
       <p:ext uri="{BB962C8B-B14F-4D97-AF65-F5344CB8AC3E}">
-        <p14:creationId xmlns:p14="http://schemas.microsoft.com/office/powerpoint/2010/main" val="2509752347"/>
+        <p14:creationId xmlns:p14="http://schemas.microsoft.com/office/powerpoint/2010/main" xmlns="" val="2509752347"/>
       </p:ext>
     </p:extLst>
   </p:cSld>
@@ -428,7 +428,7 @@
             <a:fld id="{E9F9C37B-1D36-470B-8223-D6C91242EC14}" type="datetimeFigureOut">
               <a:rPr lang="en-US" smtClean="0"/>
               <a:pPr/>
-              <a:t>12/19/2025</a:t>
+              <a:t>12/20/2025</a:t>
             </a:fld>
             <a:endParaRPr lang="en-US" dirty="0"/>
           </a:p>
@@ -480,7 +480,7 @@
     </p:spTree>
     <p:extLst>
       <p:ext uri="{BB962C8B-B14F-4D97-AF65-F5344CB8AC3E}">
-        <p14:creationId xmlns:p14="http://schemas.microsoft.com/office/powerpoint/2010/main" val="1387977912"/>
+        <p14:creationId xmlns:p14="http://schemas.microsoft.com/office/powerpoint/2010/main" xmlns="" val="1387977912"/>
       </p:ext>
     </p:extLst>
   </p:cSld>
@@ -608,7 +608,7 @@
             <a:fld id="{67C6F52A-A82B-47A2-A83A-8C4C91F2D59F}" type="datetimeFigureOut">
               <a:rPr lang="en-US" smtClean="0"/>
               <a:pPr/>
-              <a:t>12/19/2025</a:t>
+              <a:t>12/20/2025</a:t>
             </a:fld>
             <a:endParaRPr lang="en-US" dirty="0"/>
           </a:p>
@@ -660,7 +660,7 @@
     </p:spTree>
     <p:extLst>
       <p:ext uri="{BB962C8B-B14F-4D97-AF65-F5344CB8AC3E}">
-        <p14:creationId xmlns:p14="http://schemas.microsoft.com/office/powerpoint/2010/main" val="570333275"/>
+        <p14:creationId xmlns:p14="http://schemas.microsoft.com/office/powerpoint/2010/main" xmlns="" val="570333275"/>
       </p:ext>
     </p:extLst>
   </p:cSld>
@@ -778,7 +778,7 @@
             <a:fld id="{F070A7B3-6521-4DCA-87E5-044747A908C1}" type="datetimeFigureOut">
               <a:rPr lang="en-US" smtClean="0"/>
               <a:pPr/>
-              <a:t>12/19/2025</a:t>
+              <a:t>12/20/2025</a:t>
             </a:fld>
             <a:endParaRPr lang="en-US" dirty="0"/>
           </a:p>
@@ -830,7 +830,7 @@
     </p:spTree>
     <p:extLst>
       <p:ext uri="{BB962C8B-B14F-4D97-AF65-F5344CB8AC3E}">
-        <p14:creationId xmlns:p14="http://schemas.microsoft.com/office/powerpoint/2010/main" val="4186622974"/>
+        <p14:creationId xmlns:p14="http://schemas.microsoft.com/office/powerpoint/2010/main" xmlns="" val="4186622974"/>
       </p:ext>
     </p:extLst>
   </p:cSld>
@@ -1025,7 +1025,7 @@
             <a:fld id="{1160EA64-D806-43AC-9DF2-F8C432F32B4C}" type="datetimeFigureOut">
               <a:rPr lang="en-US" smtClean="0"/>
               <a:pPr/>
-              <a:t>12/19/2025</a:t>
+              <a:t>12/20/2025</a:t>
             </a:fld>
             <a:endParaRPr lang="en-US" dirty="0"/>
           </a:p>
@@ -1077,7 +1077,7 @@
     </p:spTree>
     <p:extLst>
       <p:ext uri="{BB962C8B-B14F-4D97-AF65-F5344CB8AC3E}">
-        <p14:creationId xmlns:p14="http://schemas.microsoft.com/office/powerpoint/2010/main" val="2255896077"/>
+        <p14:creationId xmlns:p14="http://schemas.microsoft.com/office/powerpoint/2010/main" xmlns="" val="2255896077"/>
       </p:ext>
     </p:extLst>
   </p:cSld>
@@ -1256,7 +1256,7 @@
             <a:fld id="{AB134690-1557-4C89-A502-4959FE7FAD70}" type="datetimeFigureOut">
               <a:rPr lang="en-US" smtClean="0"/>
               <a:pPr/>
-              <a:t>12/19/2025</a:t>
+              <a:t>12/20/2025</a:t>
             </a:fld>
             <a:endParaRPr lang="en-US" dirty="0"/>
           </a:p>
@@ -1308,7 +1308,7 @@
     </p:spTree>
     <p:extLst>
       <p:ext uri="{BB962C8B-B14F-4D97-AF65-F5344CB8AC3E}">
-        <p14:creationId xmlns:p14="http://schemas.microsoft.com/office/powerpoint/2010/main" val="399975098"/>
+        <p14:creationId xmlns:p14="http://schemas.microsoft.com/office/powerpoint/2010/main" xmlns="" val="399975098"/>
       </p:ext>
     </p:extLst>
   </p:cSld>
@@ -1317,7 +1317,7 @@
   </p:clrMapOvr>
   <p:extLst>
     <p:ext uri="{DCECCB84-F9BA-43D5-87BE-67443E8EF086}">
-      <p15:sldGuideLst xmlns:p15="http://schemas.microsoft.com/office/powerpoint/2012/main"/>
+      <p15:sldGuideLst xmlns:p15="http://schemas.microsoft.com/office/powerpoint/2012/main" xmlns=""/>
     </p:ext>
   </p:extLst>
 </p:sldLayout>
@@ -1627,7 +1627,7 @@
             <a:fld id="{4F7D4976-E339-4826-83B7-FBD03F55ECF8}" type="datetimeFigureOut">
               <a:rPr lang="en-US" smtClean="0"/>
               <a:pPr/>
-              <a:t>12/19/2025</a:t>
+              <a:t>12/20/2025</a:t>
             </a:fld>
             <a:endParaRPr lang="en-US" dirty="0"/>
           </a:p>
@@ -1679,7 +1679,7 @@
     </p:spTree>
     <p:extLst>
       <p:ext uri="{BB962C8B-B14F-4D97-AF65-F5344CB8AC3E}">
-        <p14:creationId xmlns:p14="http://schemas.microsoft.com/office/powerpoint/2010/main" val="3691994714"/>
+        <p14:creationId xmlns:p14="http://schemas.microsoft.com/office/powerpoint/2010/main" xmlns="" val="3691994714"/>
       </p:ext>
     </p:extLst>
   </p:cSld>
@@ -1688,7 +1688,7 @@
   </p:clrMapOvr>
   <p:extLst>
     <p:ext uri="{DCECCB84-F9BA-43D5-87BE-67443E8EF086}">
-      <p15:sldGuideLst xmlns:p15="http://schemas.microsoft.com/office/powerpoint/2012/main"/>
+      <p15:sldGuideLst xmlns:p15="http://schemas.microsoft.com/office/powerpoint/2012/main" xmlns=""/>
     </p:ext>
   </p:extLst>
 </p:sldLayout>
@@ -1751,7 +1751,7 @@
             <a:fld id="{E1037C31-9E7A-4F99-8774-A0E530DE1A42}" type="datetimeFigureOut">
               <a:rPr lang="en-US" smtClean="0"/>
               <a:pPr/>
-              <a:t>12/19/2025</a:t>
+              <a:t>12/20/2025</a:t>
             </a:fld>
             <a:endParaRPr lang="en-US" dirty="0"/>
           </a:p>
@@ -1803,7 +1803,7 @@
     </p:spTree>
     <p:extLst>
       <p:ext uri="{BB962C8B-B14F-4D97-AF65-F5344CB8AC3E}">
-        <p14:creationId xmlns:p14="http://schemas.microsoft.com/office/powerpoint/2010/main" val="409742779"/>
+        <p14:creationId xmlns:p14="http://schemas.microsoft.com/office/powerpoint/2010/main" xmlns="" val="409742779"/>
       </p:ext>
     </p:extLst>
   </p:cSld>
@@ -1848,7 +1848,7 @@
             <a:fld id="{C278504F-A551-4DE0-9316-4DCD1D8CC752}" type="datetimeFigureOut">
               <a:rPr lang="en-US" smtClean="0"/>
               <a:pPr/>
-              <a:t>12/19/2025</a:t>
+              <a:t>12/20/2025</a:t>
             </a:fld>
             <a:endParaRPr lang="en-US" dirty="0"/>
           </a:p>
@@ -1900,7 +1900,7 @@
     </p:spTree>
     <p:extLst>
       <p:ext uri="{BB962C8B-B14F-4D97-AF65-F5344CB8AC3E}">
-        <p14:creationId xmlns:p14="http://schemas.microsoft.com/office/powerpoint/2010/main" val="540944781"/>
+        <p14:creationId xmlns:p14="http://schemas.microsoft.com/office/powerpoint/2010/main" xmlns="" val="540944781"/>
       </p:ext>
     </p:extLst>
   </p:cSld>
@@ -2125,7 +2125,7 @@
             <a:fld id="{1160EA64-D806-43AC-9DF2-F8C432F32B4C}" type="datetimeFigureOut">
               <a:rPr lang="en-US" smtClean="0"/>
               <a:pPr/>
-              <a:t>12/19/2025</a:t>
+              <a:t>12/20/2025</a:t>
             </a:fld>
             <a:endParaRPr lang="en-US" dirty="0"/>
           </a:p>
@@ -2177,7 +2177,7 @@
     </p:spTree>
     <p:extLst>
       <p:ext uri="{BB962C8B-B14F-4D97-AF65-F5344CB8AC3E}">
-        <p14:creationId xmlns:p14="http://schemas.microsoft.com/office/powerpoint/2010/main" val="1015439884"/>
+        <p14:creationId xmlns:p14="http://schemas.microsoft.com/office/powerpoint/2010/main" xmlns="" val="1015439884"/>
       </p:ext>
     </p:extLst>
   </p:cSld>
@@ -2186,7 +2186,7 @@
   </p:clrMapOvr>
   <p:extLst>
     <p:ext uri="{DCECCB84-F9BA-43D5-87BE-67443E8EF086}">
-      <p15:sldGuideLst xmlns:p15="http://schemas.microsoft.com/office/powerpoint/2012/main"/>
+      <p15:sldGuideLst xmlns:p15="http://schemas.microsoft.com/office/powerpoint/2012/main" xmlns=""/>
     </p:ext>
   </p:extLst>
 </p:sldLayout>
@@ -2384,7 +2384,7 @@
             <a:fld id="{1160EA64-D806-43AC-9DF2-F8C432F32B4C}" type="datetimeFigureOut">
               <a:rPr lang="en-US" smtClean="0"/>
               <a:pPr/>
-              <a:t>12/19/2025</a:t>
+              <a:t>12/20/2025</a:t>
             </a:fld>
             <a:endParaRPr lang="en-US" dirty="0"/>
           </a:p>
@@ -2436,7 +2436,7 @@
     </p:spTree>
     <p:extLst>
       <p:ext uri="{BB962C8B-B14F-4D97-AF65-F5344CB8AC3E}">
-        <p14:creationId xmlns:p14="http://schemas.microsoft.com/office/powerpoint/2010/main" val="1349152458"/>
+        <p14:creationId xmlns:p14="http://schemas.microsoft.com/office/powerpoint/2010/main" xmlns="" val="1349152458"/>
       </p:ext>
     </p:extLst>
   </p:cSld>
@@ -2597,7 +2597,7 @@
             <a:fld id="{1160EA64-D806-43AC-9DF2-F8C432F32B4C}" type="datetimeFigureOut">
               <a:rPr lang="en-US" smtClean="0"/>
               <a:pPr/>
-              <a:t>12/19/2025</a:t>
+              <a:t>12/20/2025</a:t>
             </a:fld>
             <a:endParaRPr lang="en-US" dirty="0"/>
           </a:p>
@@ -2685,7 +2685,7 @@
     </p:spTree>
     <p:extLst>
       <p:ext uri="{BB962C8B-B14F-4D97-AF65-F5344CB8AC3E}">
-        <p14:creationId xmlns:p14="http://schemas.microsoft.com/office/powerpoint/2010/main" val="1105851826"/>
+        <p14:creationId xmlns:p14="http://schemas.microsoft.com/office/powerpoint/2010/main" xmlns="" val="1105851826"/>
       </p:ext>
     </p:extLst>
   </p:cSld>
@@ -2986,7 +2986,7 @@
   </p:txStyles>
   <p:extLst>
     <p:ext uri="{27BBF7A9-308A-43DC-89C8-2F10F3537804}">
-      <p15:sldGuideLst xmlns:p15="http://schemas.microsoft.com/office/powerpoint/2012/main"/>
+      <p15:sldGuideLst xmlns:p15="http://schemas.microsoft.com/office/powerpoint/2012/main" xmlns=""/>
     </p:ext>
   </p:extLst>
 </p:sldMaster>
@@ -3210,7 +3210,7 @@
           <p:nvPr>
             <p:extLst>
               <p:ext uri="{D42A27DB-BD31-4B8C-83A1-F6EECF244321}">
-                <p14:modId xmlns:p14="http://schemas.microsoft.com/office/powerpoint/2010/main" val="2088674832"/>
+                <p14:modId xmlns:p14="http://schemas.microsoft.com/office/powerpoint/2010/main" xmlns="" val="2088674832"/>
               </p:ext>
             </p:extLst>
           </p:nvPr>
@@ -3229,14 +3229,14 @@
                 <a:gridCol w="5577765">
                   <a:extLst>
                     <a:ext uri="{9D8B030D-6E8A-4147-A177-3AD203B41FA5}">
-                      <a16:colId xmlns:a16="http://schemas.microsoft.com/office/drawing/2014/main" val="856406293"/>
+                      <a16:colId xmlns:a16="http://schemas.microsoft.com/office/drawing/2014/main" xmlns="" val="856406293"/>
                     </a:ext>
                   </a:extLst>
                 </a:gridCol>
                 <a:gridCol w="5145654">
                   <a:extLst>
                     <a:ext uri="{9D8B030D-6E8A-4147-A177-3AD203B41FA5}">
-                      <a16:colId xmlns:a16="http://schemas.microsoft.com/office/drawing/2014/main" val="3577592057"/>
+                      <a16:colId xmlns:a16="http://schemas.microsoft.com/office/drawing/2014/main" xmlns="" val="3577592057"/>
                     </a:ext>
                   </a:extLst>
                 </a:gridCol>
@@ -3362,7 +3362,7 @@
                 </a:tc>
                 <a:extLst>
                   <a:ext uri="{0D108BD9-81ED-4DB2-BD59-A6C34878D82A}">
-                    <a16:rowId xmlns:a16="http://schemas.microsoft.com/office/drawing/2014/main" val="3476427313"/>
+                    <a16:rowId xmlns:a16="http://schemas.microsoft.com/office/drawing/2014/main" xmlns="" val="3476427313"/>
                   </a:ext>
                 </a:extLst>
               </a:tr>
@@ -3429,7 +3429,7 @@
     </p:spTree>
     <p:extLst>
       <p:ext uri="{BB962C8B-B14F-4D97-AF65-F5344CB8AC3E}">
-        <p14:creationId xmlns:p14="http://schemas.microsoft.com/office/powerpoint/2010/main" val="4290534139"/>
+        <p14:creationId xmlns:p14="http://schemas.microsoft.com/office/powerpoint/2010/main" xmlns="" val="4290534139"/>
       </p:ext>
     </p:extLst>
   </p:cSld>
@@ -3521,6 +3521,74 @@
               </a:spcBef>
               <a:buNone/>
             </a:pPr>
+            <a:r>
+              <a:rPr lang="ru-RU" dirty="0" smtClean="0"/>
+              <a:t>Мобильное приложение </a:t>
+            </a:r>
+            <a:r>
+              <a:rPr lang="ru-RU" dirty="0" smtClean="0"/>
+              <a:t>“</a:t>
+            </a:r>
+            <a:r>
+              <a:rPr lang="en-US" dirty="0" smtClean="0"/>
+              <a:t>Shoe Shop</a:t>
+            </a:r>
+            <a:r>
+              <a:rPr lang="ru-RU" dirty="0" smtClean="0"/>
+              <a:t>" </a:t>
+            </a:r>
+            <a:r>
+              <a:rPr lang="ru-RU" dirty="0" smtClean="0"/>
+              <a:t>— это удобное и производительное решение для </a:t>
+            </a:r>
+            <a:r>
+              <a:rPr lang="ru-RU" dirty="0" err="1" smtClean="0"/>
+              <a:t>онлайн-шопинга</a:t>
+            </a:r>
+            <a:r>
+              <a:rPr lang="ru-RU" dirty="0" smtClean="0"/>
+              <a:t> одежды, с интуитивным интерфейсом, быстрой навигацией и </a:t>
+            </a:r>
+            <a:r>
+              <a:rPr lang="ru-RU" dirty="0" err="1" smtClean="0"/>
+              <a:t>seamless</a:t>
+            </a:r>
+            <a:r>
+              <a:rPr lang="ru-RU" dirty="0" smtClean="0"/>
+              <a:t> опытом пользователя на </a:t>
+            </a:r>
+            <a:r>
+              <a:rPr lang="ru-RU" dirty="0" err="1" smtClean="0"/>
+              <a:t>iOS</a:t>
+            </a:r>
+            <a:r>
+              <a:rPr lang="ru-RU" dirty="0" smtClean="0"/>
+              <a:t>/</a:t>
+            </a:r>
+            <a:r>
+              <a:rPr lang="ru-RU" dirty="0" err="1" smtClean="0"/>
+              <a:t>Android</a:t>
+            </a:r>
+            <a:r>
+              <a:rPr lang="ru-RU" dirty="0" smtClean="0"/>
+              <a:t>. Оно оптимизировано для повседневного использования: каталог загружается мгновенно, поиск работает с </a:t>
+            </a:r>
+            <a:r>
+              <a:rPr lang="ru-RU" dirty="0" err="1" smtClean="0"/>
+              <a:t>автодополнением</a:t>
+            </a:r>
+            <a:r>
+              <a:rPr lang="ru-RU" dirty="0" smtClean="0"/>
+              <a:t>, корзина синхронизируется </a:t>
+            </a:r>
+            <a:r>
+              <a:rPr lang="ru-RU" dirty="0" err="1" smtClean="0"/>
+              <a:t>оффлайн</a:t>
+            </a:r>
+            <a:r>
+              <a:rPr lang="ru-RU" dirty="0" smtClean="0"/>
+              <a:t>, а уведомления приходят вовремя — все для максимального комфорта без лагов или сложностей.</a:t>
+            </a:r>
             <a:endParaRPr lang="ru-RU" dirty="0">
               <a:latin typeface="Times New Roman" panose="02020603050405020304" pitchFamily="18" charset="0"/>
               <a:cs typeface="Times New Roman" panose="02020603050405020304" pitchFamily="18" charset="0"/>
@@ -3531,7 +3599,7 @@
     </p:spTree>
     <p:extLst>
       <p:ext uri="{BB962C8B-B14F-4D97-AF65-F5344CB8AC3E}">
-        <p14:creationId xmlns:p14="http://schemas.microsoft.com/office/powerpoint/2010/main" val="3950111895"/>
+        <p14:creationId xmlns:p14="http://schemas.microsoft.com/office/powerpoint/2010/main" xmlns="" val="3950111895"/>
       </p:ext>
     </p:extLst>
   </p:cSld>
@@ -3600,7 +3668,7 @@
           <p:cNvPr id="3" name="Рисунок 2">
             <a:extLst>
               <a:ext uri="{FF2B5EF4-FFF2-40B4-BE49-F238E27FC236}">
-                <a16:creationId xmlns:a16="http://schemas.microsoft.com/office/drawing/2014/main" id="{0DBEFCD6-D3F6-857A-A55D-CCF499E9013A}"/>
+                <a16:creationId xmlns:a16="http://schemas.microsoft.com/office/drawing/2014/main" xmlns="" id="{0DBEFCD6-D3F6-857A-A55D-CCF499E9013A}"/>
               </a:ext>
             </a:extLst>
           </p:cNvPr>
@@ -3628,7 +3696,7 @@
     </p:spTree>
     <p:extLst>
       <p:ext uri="{BB962C8B-B14F-4D97-AF65-F5344CB8AC3E}">
-        <p14:creationId xmlns:p14="http://schemas.microsoft.com/office/powerpoint/2010/main" val="4271465794"/>
+        <p14:creationId xmlns:p14="http://schemas.microsoft.com/office/powerpoint/2010/main" xmlns="" val="4271465794"/>
       </p:ext>
     </p:extLst>
   </p:cSld>
@@ -3646,7 +3714,7 @@
         <p:cNvPr id="1" name="">
           <a:extLst>
             <a:ext uri="{FF2B5EF4-FFF2-40B4-BE49-F238E27FC236}">
-              <a16:creationId xmlns:a16="http://schemas.microsoft.com/office/drawing/2014/main" id="{136C0DBA-6C30-4CE3-062C-FB85A633D24E}"/>
+              <a16:creationId xmlns:a16="http://schemas.microsoft.com/office/drawing/2014/main" xmlns="" id="{136C0DBA-6C30-4CE3-062C-FB85A633D24E}"/>
             </a:ext>
           </a:extLst>
         </p:cNvPr>
@@ -3666,7 +3734,7 @@
           <p:cNvPr id="2" name="Заголовок 1">
             <a:extLst>
               <a:ext uri="{FF2B5EF4-FFF2-40B4-BE49-F238E27FC236}">
-                <a16:creationId xmlns:a16="http://schemas.microsoft.com/office/drawing/2014/main" id="{E739F4A2-BE2D-F2E8-11D9-B28F9C2F24E7}"/>
+                <a16:creationId xmlns:a16="http://schemas.microsoft.com/office/drawing/2014/main" xmlns="" id="{E739F4A2-BE2D-F2E8-11D9-B28F9C2F24E7}"/>
               </a:ext>
             </a:extLst>
           </p:cNvPr>
@@ -3709,7 +3777,7 @@
           <p:cNvPr id="3" name="Объект 2">
             <a:extLst>
               <a:ext uri="{FF2B5EF4-FFF2-40B4-BE49-F238E27FC236}">
-                <a16:creationId xmlns:a16="http://schemas.microsoft.com/office/drawing/2014/main" id="{24836A63-6730-2201-6EE6-DD30F26B5422}"/>
+                <a16:creationId xmlns:a16="http://schemas.microsoft.com/office/drawing/2014/main" xmlns="" id="{24836A63-6730-2201-6EE6-DD30F26B5422}"/>
               </a:ext>
             </a:extLst>
           </p:cNvPr>
@@ -3875,7 +3943,7 @@
     </p:spTree>
     <p:extLst>
       <p:ext uri="{BB962C8B-B14F-4D97-AF65-F5344CB8AC3E}">
-        <p14:creationId xmlns:p14="http://schemas.microsoft.com/office/powerpoint/2010/main" val="2055570481"/>
+        <p14:creationId xmlns:p14="http://schemas.microsoft.com/office/powerpoint/2010/main" xmlns="" val="2055570481"/>
       </p:ext>
     </p:extLst>
   </p:cSld>
@@ -3893,7 +3961,7 @@
         <p:cNvPr id="1" name="">
           <a:extLst>
             <a:ext uri="{FF2B5EF4-FFF2-40B4-BE49-F238E27FC236}">
-              <a16:creationId xmlns:a16="http://schemas.microsoft.com/office/drawing/2014/main" id="{85D5BBD2-AC55-51DA-B174-63D1649DF75E}"/>
+              <a16:creationId xmlns:a16="http://schemas.microsoft.com/office/drawing/2014/main" xmlns="" id="{85D5BBD2-AC55-51DA-B174-63D1649DF75E}"/>
             </a:ext>
           </a:extLst>
         </p:cNvPr>
@@ -3913,7 +3981,7 @@
           <p:cNvPr id="2" name="Заголовок 1">
             <a:extLst>
               <a:ext uri="{FF2B5EF4-FFF2-40B4-BE49-F238E27FC236}">
-                <a16:creationId xmlns:a16="http://schemas.microsoft.com/office/drawing/2014/main" id="{BFCAE6E8-39D7-1530-77CB-2650D780DF45}"/>
+                <a16:creationId xmlns:a16="http://schemas.microsoft.com/office/drawing/2014/main" xmlns="" id="{BFCAE6E8-39D7-1530-77CB-2650D780DF45}"/>
               </a:ext>
             </a:extLst>
           </p:cNvPr>
@@ -3956,7 +4024,7 @@
           <p:cNvPr id="3" name="Объект 2">
             <a:extLst>
               <a:ext uri="{FF2B5EF4-FFF2-40B4-BE49-F238E27FC236}">
-                <a16:creationId xmlns:a16="http://schemas.microsoft.com/office/drawing/2014/main" id="{211B4671-57B7-7403-475C-E02F9AB52374}"/>
+                <a16:creationId xmlns:a16="http://schemas.microsoft.com/office/drawing/2014/main" xmlns="" id="{211B4671-57B7-7403-475C-E02F9AB52374}"/>
               </a:ext>
             </a:extLst>
           </p:cNvPr>
@@ -4094,7 +4162,7 @@
     </p:spTree>
     <p:extLst>
       <p:ext uri="{BB962C8B-B14F-4D97-AF65-F5344CB8AC3E}">
-        <p14:creationId xmlns:p14="http://schemas.microsoft.com/office/powerpoint/2010/main" val="1744740872"/>
+        <p14:creationId xmlns:p14="http://schemas.microsoft.com/office/powerpoint/2010/main" xmlns="" val="1744740872"/>
       </p:ext>
     </p:extLst>
   </p:cSld>
@@ -4112,7 +4180,7 @@
         <p:cNvPr id="1" name="">
           <a:extLst>
             <a:ext uri="{FF2B5EF4-FFF2-40B4-BE49-F238E27FC236}">
-              <a16:creationId xmlns:a16="http://schemas.microsoft.com/office/drawing/2014/main" id="{A4131DBF-F67F-321F-064C-EF9C2817AC90}"/>
+              <a16:creationId xmlns:a16="http://schemas.microsoft.com/office/drawing/2014/main" xmlns="" id="{A4131DBF-F67F-321F-064C-EF9C2817AC90}"/>
             </a:ext>
           </a:extLst>
         </p:cNvPr>
@@ -4132,7 +4200,7 @@
           <p:cNvPr id="2" name="Заголовок 1">
             <a:extLst>
               <a:ext uri="{FF2B5EF4-FFF2-40B4-BE49-F238E27FC236}">
-                <a16:creationId xmlns:a16="http://schemas.microsoft.com/office/drawing/2014/main" id="{86B1980C-C5A7-140A-EEAB-D5C4328C3318}"/>
+                <a16:creationId xmlns:a16="http://schemas.microsoft.com/office/drawing/2014/main" xmlns="" id="{86B1980C-C5A7-140A-EEAB-D5C4328C3318}"/>
               </a:ext>
             </a:extLst>
           </p:cNvPr>
@@ -4174,7 +4242,7 @@
           <p:cNvPr id="3" name="Подзаголовок 2">
             <a:extLst>
               <a:ext uri="{FF2B5EF4-FFF2-40B4-BE49-F238E27FC236}">
-                <a16:creationId xmlns:a16="http://schemas.microsoft.com/office/drawing/2014/main" id="{FE6CAAA4-3022-C59D-B7C0-05696F0E9791}"/>
+                <a16:creationId xmlns:a16="http://schemas.microsoft.com/office/drawing/2014/main" xmlns="" id="{FE6CAAA4-3022-C59D-B7C0-05696F0E9791}"/>
               </a:ext>
             </a:extLst>
           </p:cNvPr>
@@ -4211,7 +4279,7 @@
           <p:cNvPr id="4" name="Прямоугольник 3">
             <a:extLst>
               <a:ext uri="{FF2B5EF4-FFF2-40B4-BE49-F238E27FC236}">
-                <a16:creationId xmlns:a16="http://schemas.microsoft.com/office/drawing/2014/main" id="{0576D228-6E50-6965-6CAE-460D4772A211}"/>
+                <a16:creationId xmlns:a16="http://schemas.microsoft.com/office/drawing/2014/main" xmlns="" id="{0576D228-6E50-6965-6CAE-460D4772A211}"/>
               </a:ext>
             </a:extLst>
           </p:cNvPr>
@@ -4342,7 +4410,7 @@
           <p:cNvPr id="5" name="Таблица 4">
             <a:extLst>
               <a:ext uri="{FF2B5EF4-FFF2-40B4-BE49-F238E27FC236}">
-                <a16:creationId xmlns:a16="http://schemas.microsoft.com/office/drawing/2014/main" id="{92FFF80C-668B-6DD6-E73D-4C19B99F0F38}"/>
+                <a16:creationId xmlns:a16="http://schemas.microsoft.com/office/drawing/2014/main" xmlns="" id="{92FFF80C-668B-6DD6-E73D-4C19B99F0F38}"/>
               </a:ext>
             </a:extLst>
           </p:cNvPr>
@@ -4365,14 +4433,14 @@
                 <a:gridCol w="5577765">
                   <a:extLst>
                     <a:ext uri="{9D8B030D-6E8A-4147-A177-3AD203B41FA5}">
-                      <a16:colId xmlns:a16="http://schemas.microsoft.com/office/drawing/2014/main" val="856406293"/>
+                      <a16:colId xmlns:a16="http://schemas.microsoft.com/office/drawing/2014/main" xmlns="" val="856406293"/>
                     </a:ext>
                   </a:extLst>
                 </a:gridCol>
                 <a:gridCol w="5145654">
                   <a:extLst>
                     <a:ext uri="{9D8B030D-6E8A-4147-A177-3AD203B41FA5}">
-                      <a16:colId xmlns:a16="http://schemas.microsoft.com/office/drawing/2014/main" val="3577592057"/>
+                      <a16:colId xmlns:a16="http://schemas.microsoft.com/office/drawing/2014/main" xmlns="" val="3577592057"/>
                     </a:ext>
                   </a:extLst>
                 </a:gridCol>
@@ -4498,7 +4566,7 @@
                 </a:tc>
                 <a:extLst>
                   <a:ext uri="{0D108BD9-81ED-4DB2-BD59-A6C34878D82A}">
-                    <a16:rowId xmlns:a16="http://schemas.microsoft.com/office/drawing/2014/main" val="3476427313"/>
+                    <a16:rowId xmlns:a16="http://schemas.microsoft.com/office/drawing/2014/main" xmlns="" val="3476427313"/>
                   </a:ext>
                 </a:extLst>
               </a:tr>
@@ -4511,7 +4579,7 @@
           <p:cNvPr id="6" name="Прямоугольник 5">
             <a:extLst>
               <a:ext uri="{FF2B5EF4-FFF2-40B4-BE49-F238E27FC236}">
-                <a16:creationId xmlns:a16="http://schemas.microsoft.com/office/drawing/2014/main" id="{1248E6C9-6B8D-DCAD-04F6-65152AC3349C}"/>
+                <a16:creationId xmlns:a16="http://schemas.microsoft.com/office/drawing/2014/main" xmlns="" id="{1248E6C9-6B8D-DCAD-04F6-65152AC3349C}"/>
               </a:ext>
             </a:extLst>
           </p:cNvPr>
@@ -4571,7 +4639,7 @@
     </p:spTree>
     <p:extLst>
       <p:ext uri="{BB962C8B-B14F-4D97-AF65-F5344CB8AC3E}">
-        <p14:creationId xmlns:p14="http://schemas.microsoft.com/office/powerpoint/2010/main" val="3622671980"/>
+        <p14:creationId xmlns:p14="http://schemas.microsoft.com/office/powerpoint/2010/main" xmlns="" val="3622671980"/>
       </p:ext>
     </p:extLst>
   </p:cSld>
@@ -4836,7 +4904,7 @@
   <a:extraClrSchemeLst/>
   <a:extLst>
     <a:ext uri="{05A4C25C-085E-4340-85A3-A5531E510DB2}">
-      <thm15:themeFamily xmlns:thm15="http://schemas.microsoft.com/office/thememl/2012/main" name="Office Theme" id="{62F939B6-93AF-4DB8-9C6B-D6C7DFDC589F}" vid="{4A3C46E8-61CC-4603-A589-7422A47A8E4A}"/>
+      <thm15:themeFamily xmlns:thm15="http://schemas.microsoft.com/office/thememl/2012/main" xmlns="" name="Office Theme" id="{62F939B6-93AF-4DB8-9C6B-D6C7DFDC589F}" vid="{4A3C46E8-61CC-4603-A589-7422A47A8E4A}"/>
     </a:ext>
   </a:extLst>
 </a:theme>
